--- a/topic07-methods/unit-1/talk-0-methods-terminology/methods-terminology.pptx
+++ b/topic07-methods/unit-1/talk-0-methods-terminology/methods-terminology.pptx
@@ -226,7 +226,7 @@
           <a:p>
             <a:fld id="{58C3D141-1E1C-433C-AD3A-CD56CBBB4F9F}" type="datetimeFigureOut">
               <a:rPr lang="en-IE" smtClean="0"/>
-              <a:t>08/10/2025</a:t>
+              <a:t>30/10/2025</a:t>
             </a:fld>
             <a:endParaRPr lang="en-IE"/>
           </a:p>
@@ -1413,7 +1413,7 @@
             <a:fld id="{1D8BD707-D9CF-40AE-B4C6-C98DA3205C09}" type="datetimeFigureOut">
               <a:rPr lang="en-US" smtClean="0"/>
               <a:pPr/>
-              <a:t>10/8/2025</a:t>
+              <a:t>10/30/25</a:t>
             </a:fld>
             <a:endParaRPr lang="en-US"/>
           </a:p>
@@ -1583,7 +1583,7 @@
             <a:fld id="{1D8BD707-D9CF-40AE-B4C6-C98DA3205C09}" type="datetimeFigureOut">
               <a:rPr lang="en-US" smtClean="0"/>
               <a:pPr/>
-              <a:t>10/8/2025</a:t>
+              <a:t>10/30/25</a:t>
             </a:fld>
             <a:endParaRPr lang="en-US"/>
           </a:p>
@@ -1763,7 +1763,7 @@
             <a:fld id="{1D8BD707-D9CF-40AE-B4C6-C98DA3205C09}" type="datetimeFigureOut">
               <a:rPr lang="en-US" smtClean="0"/>
               <a:pPr/>
-              <a:t>10/8/2025</a:t>
+              <a:t>10/30/25</a:t>
             </a:fld>
             <a:endParaRPr lang="en-US"/>
           </a:p>
@@ -2091,7 +2091,7 @@
             <a:fld id="{1D8BD707-D9CF-40AE-B4C6-C98DA3205C09}" type="datetimeFigureOut">
               <a:rPr lang="en-US" smtClean="0"/>
               <a:pPr/>
-              <a:t>10/8/2025</a:t>
+              <a:t>10/30/25</a:t>
             </a:fld>
             <a:endParaRPr lang="en-US"/>
           </a:p>
@@ -2420,7 +2420,7 @@
             <a:fld id="{1D8BD707-D9CF-40AE-B4C6-C98DA3205C09}" type="datetimeFigureOut">
               <a:rPr lang="en-US" smtClean="0"/>
               <a:pPr/>
-              <a:t>10/8/2025</a:t>
+              <a:t>10/30/25</a:t>
             </a:fld>
             <a:endParaRPr lang="en-US"/>
           </a:p>
@@ -2719,7 +2719,7 @@
             <a:fld id="{1D8BD707-D9CF-40AE-B4C6-C98DA3205C09}" type="datetimeFigureOut">
               <a:rPr lang="en-US" smtClean="0"/>
               <a:pPr/>
-              <a:t>10/8/2025</a:t>
+              <a:t>10/30/25</a:t>
             </a:fld>
             <a:endParaRPr lang="en-US"/>
           </a:p>
@@ -3224,7 +3224,7 @@
             <a:fld id="{1D8BD707-D9CF-40AE-B4C6-C98DA3205C09}" type="datetimeFigureOut">
               <a:rPr lang="en-US" smtClean="0"/>
               <a:pPr/>
-              <a:t>10/8/2025</a:t>
+              <a:t>10/30/25</a:t>
             </a:fld>
             <a:endParaRPr lang="en-US"/>
           </a:p>
@@ -3431,7 +3431,7 @@
             <a:fld id="{1D8BD707-D9CF-40AE-B4C6-C98DA3205C09}" type="datetimeFigureOut">
               <a:rPr lang="en-US" smtClean="0"/>
               <a:pPr/>
-              <a:t>10/8/2025</a:t>
+              <a:t>10/30/25</a:t>
             </a:fld>
             <a:endParaRPr lang="en-US"/>
           </a:p>
@@ -3604,7 +3604,7 @@
             <a:fld id="{1D8BD707-D9CF-40AE-B4C6-C98DA3205C09}" type="datetimeFigureOut">
               <a:rPr lang="en-US" smtClean="0"/>
               <a:pPr/>
-              <a:t>10/8/2025</a:t>
+              <a:t>10/30/25</a:t>
             </a:fld>
             <a:endParaRPr lang="en-US"/>
           </a:p>
@@ -3881,7 +3881,7 @@
             <a:fld id="{1D8BD707-D9CF-40AE-B4C6-C98DA3205C09}" type="datetimeFigureOut">
               <a:rPr lang="en-US" smtClean="0"/>
               <a:pPr/>
-              <a:t>10/8/2025</a:t>
+              <a:t>10/30/25</a:t>
             </a:fld>
             <a:endParaRPr lang="en-US"/>
           </a:p>
@@ -4138,7 +4138,7 @@
             <a:fld id="{1D8BD707-D9CF-40AE-B4C6-C98DA3205C09}" type="datetimeFigureOut">
               <a:rPr lang="en-US" smtClean="0"/>
               <a:pPr/>
-              <a:t>10/8/2025</a:t>
+              <a:t>10/30/25</a:t>
             </a:fld>
             <a:endParaRPr lang="en-US"/>
           </a:p>
@@ -4351,7 +4351,7 @@
             <a:fld id="{1D8BD707-D9CF-40AE-B4C6-C98DA3205C09}" type="datetimeFigureOut">
               <a:rPr lang="en-US" smtClean="0"/>
               <a:pPr/>
-              <a:t>10/8/2025</a:t>
+              <a:t>10/30/25</a:t>
             </a:fld>
             <a:endParaRPr lang="en-US"/>
           </a:p>
@@ -4753,7 +4753,7 @@
             <a:pPr algn="l"/>
             <a:r>
               <a:rPr lang="en-IE" sz="4000" dirty="0"/>
-              <a:t>Using Methods</a:t>
+              <a:t>Methods – So far</a:t>
             </a:r>
           </a:p>
         </p:txBody>
@@ -8733,63 +8733,6 @@
       </p:grpSpPr>
       <p:sp>
         <p:nvSpPr>
-          <p:cNvPr id="6" name="TextBox 5"/>
-          <p:cNvSpPr txBox="1"/>
-          <p:nvPr/>
-        </p:nvSpPr>
-        <p:spPr>
-          <a:xfrm>
-            <a:off x="4572000" y="1666910"/>
-            <a:ext cx="2667000" cy="1384995"/>
-          </a:xfrm>
-          <a:prstGeom prst="rect">
-            <a:avLst/>
-          </a:prstGeom>
-          <a:noFill/>
-        </p:spPr>
-        <p:txBody>
-          <a:bodyPr wrap="square" rtlCol="0">
-            <a:spAutoFit/>
-          </a:bodyPr>
-          <a:lstStyle/>
-          <a:p>
-            <a:r>
-              <a:rPr lang="en-IE" sz="2800" dirty="0"/>
-              <a:t>void </a:t>
-            </a:r>
-            <a:r>
-              <a:rPr lang="en-IE" sz="2800" dirty="0" err="1"/>
-              <a:t>noStroke</a:t>
-            </a:r>
-            <a:r>
-              <a:rPr lang="en-IE" sz="2800" dirty="0"/>
-              <a:t>()</a:t>
-            </a:r>
-          </a:p>
-          <a:p>
-            <a:r>
-              <a:rPr lang="en-IE" sz="2800" dirty="0"/>
-              <a:t>void setup()</a:t>
-            </a:r>
-          </a:p>
-          <a:p>
-            <a:r>
-              <a:rPr lang="en-IE" sz="2800" dirty="0"/>
-              <a:t>void </a:t>
-            </a:r>
-            <a:r>
-              <a:rPr lang="en-IE" sz="2800" dirty="0" err="1"/>
-              <a:t>noCursor</a:t>
-            </a:r>
-            <a:r>
-              <a:rPr lang="en-IE" sz="2800" dirty="0"/>
-              <a:t>()</a:t>
-            </a:r>
-          </a:p>
-        </p:txBody>
-      </p:sp>
-      <p:sp>
-        <p:nvSpPr>
           <p:cNvPr id="2" name="Title 1"/>
           <p:cNvSpPr>
             <a:spLocks noGrp="1"/>
@@ -8826,7 +8769,7 @@
         </p:nvSpPr>
         <p:spPr>
           <a:xfrm>
-            <a:off x="812800" y="3429000"/>
+            <a:off x="613611" y="3062307"/>
             <a:ext cx="10769600" cy="3159323"/>
           </a:xfrm>
         </p:spPr>
@@ -8891,144 +8834,170 @@
           </a:p>
         </p:txBody>
       </p:sp>
-      <p:sp>
-        <p:nvSpPr>
-          <p:cNvPr id="10" name="Rectangle 9"/>
-          <p:cNvSpPr/>
+      <p:grpSp>
+        <p:nvGrpSpPr>
+          <p:cNvPr id="7" name="Group 6">
+            <a:extLst>
+              <a:ext uri="{FF2B5EF4-FFF2-40B4-BE49-F238E27FC236}">
+                <a16:creationId xmlns:a16="http://schemas.microsoft.com/office/drawing/2014/main" id="{ADA0388A-969A-BA5A-5CA8-397016EDCD7E}"/>
+              </a:ext>
+            </a:extLst>
+          </p:cNvPr>
+          <p:cNvGrpSpPr/>
           <p:nvPr/>
-        </p:nvSpPr>
-        <p:spPr>
+        </p:nvGrpSpPr>
+        <p:grpSpPr>
           <a:xfrm>
-            <a:off x="6621271" y="1684231"/>
-            <a:ext cx="304800" cy="507611"/>
+            <a:off x="3860800" y="1853174"/>
+            <a:ext cx="3657600" cy="989875"/>
+            <a:chOff x="4419600" y="1587389"/>
+            <a:chExt cx="3657600" cy="989875"/>
           </a:xfrm>
-          <a:prstGeom prst="rect">
-            <a:avLst/>
-          </a:prstGeom>
-          <a:noFill/>
-          <a:ln>
-            <a:solidFill>
-              <a:srgbClr val="FF0000"/>
-            </a:solidFill>
-          </a:ln>
-        </p:spPr>
-        <p:style>
-          <a:lnRef idx="2">
-            <a:schemeClr val="accent1">
-              <a:shade val="50000"/>
-            </a:schemeClr>
-          </a:lnRef>
-          <a:fillRef idx="1">
-            <a:schemeClr val="accent1"/>
-          </a:fillRef>
-          <a:effectRef idx="0">
-            <a:schemeClr val="accent1"/>
-          </a:effectRef>
-          <a:fontRef idx="minor">
-            <a:schemeClr val="lt1"/>
-          </a:fontRef>
-        </p:style>
-        <p:txBody>
-          <a:bodyPr rtlCol="0" anchor="ctr"/>
-          <a:lstStyle/>
-          <a:p>
-            <a:pPr algn="ctr"/>
-            <a:endParaRPr lang="en-IE" sz="1800"/>
-          </a:p>
-        </p:txBody>
-      </p:sp>
-      <p:sp>
-        <p:nvSpPr>
-          <p:cNvPr id="13" name="Rectangle 12"/>
-          <p:cNvSpPr/>
-          <p:nvPr/>
-        </p:nvSpPr>
-        <p:spPr>
-          <a:xfrm>
-            <a:off x="6164071" y="2141431"/>
-            <a:ext cx="304800" cy="507611"/>
-          </a:xfrm>
-          <a:prstGeom prst="rect">
-            <a:avLst/>
-          </a:prstGeom>
-          <a:noFill/>
-          <a:ln>
-            <a:solidFill>
-              <a:srgbClr val="FF0000"/>
-            </a:solidFill>
-          </a:ln>
-        </p:spPr>
-        <p:style>
-          <a:lnRef idx="2">
-            <a:schemeClr val="accent1">
-              <a:shade val="50000"/>
-            </a:schemeClr>
-          </a:lnRef>
-          <a:fillRef idx="1">
-            <a:schemeClr val="accent1"/>
-          </a:fillRef>
-          <a:effectRef idx="0">
-            <a:schemeClr val="accent1"/>
-          </a:effectRef>
-          <a:fontRef idx="minor">
-            <a:schemeClr val="lt1"/>
-          </a:fontRef>
-        </p:style>
-        <p:txBody>
-          <a:bodyPr rtlCol="0" anchor="ctr"/>
-          <a:lstStyle/>
-          <a:p>
-            <a:pPr algn="ctr"/>
-            <a:endParaRPr lang="en-IE" sz="1800"/>
-          </a:p>
-        </p:txBody>
-      </p:sp>
-      <p:sp>
-        <p:nvSpPr>
-          <p:cNvPr id="14" name="Rectangle 13"/>
-          <p:cNvSpPr/>
-          <p:nvPr/>
-        </p:nvSpPr>
-        <p:spPr>
-          <a:xfrm>
-            <a:off x="6697471" y="2572841"/>
-            <a:ext cx="304800" cy="507611"/>
-          </a:xfrm>
-          <a:prstGeom prst="rect">
-            <a:avLst/>
-          </a:prstGeom>
-          <a:noFill/>
-          <a:ln>
-            <a:solidFill>
-              <a:srgbClr val="FF0000"/>
-            </a:solidFill>
-          </a:ln>
-        </p:spPr>
-        <p:style>
-          <a:lnRef idx="2">
-            <a:schemeClr val="accent1">
-              <a:shade val="50000"/>
-            </a:schemeClr>
-          </a:lnRef>
-          <a:fillRef idx="1">
-            <a:schemeClr val="accent1"/>
-          </a:fillRef>
-          <a:effectRef idx="0">
-            <a:schemeClr val="accent1"/>
-          </a:effectRef>
-          <a:fontRef idx="minor">
-            <a:schemeClr val="lt1"/>
-          </a:fontRef>
-        </p:style>
-        <p:txBody>
-          <a:bodyPr rtlCol="0" anchor="ctr"/>
-          <a:lstStyle/>
-          <a:p>
-            <a:pPr algn="ctr"/>
-            <a:endParaRPr lang="en-IE" sz="1800"/>
-          </a:p>
-        </p:txBody>
-      </p:sp>
+        </p:grpSpPr>
+        <p:sp>
+          <p:nvSpPr>
+            <p:cNvPr id="6" name="TextBox 5"/>
+            <p:cNvSpPr txBox="1"/>
+            <p:nvPr/>
+          </p:nvSpPr>
+          <p:spPr>
+            <a:xfrm>
+              <a:off x="4419600" y="1587389"/>
+              <a:ext cx="3657600" cy="954107"/>
+            </a:xfrm>
+            <a:prstGeom prst="rect">
+              <a:avLst/>
+            </a:prstGeom>
+            <a:noFill/>
+          </p:spPr>
+          <p:txBody>
+            <a:bodyPr wrap="square" rtlCol="0">
+              <a:spAutoFit/>
+            </a:bodyPr>
+            <a:lstStyle/>
+            <a:p>
+              <a:r>
+                <a:rPr lang="en-IE" sz="2800" dirty="0"/>
+                <a:t>void </a:t>
+              </a:r>
+              <a:r>
+                <a:rPr lang="en-IE" sz="2800" dirty="0" err="1"/>
+                <a:t>printFirstName</a:t>
+              </a:r>
+              <a:r>
+                <a:rPr lang="en-IE" sz="2800" dirty="0"/>
+                <a:t>()</a:t>
+              </a:r>
+            </a:p>
+            <a:p>
+              <a:r>
+                <a:rPr lang="en-IE" sz="2800" dirty="0"/>
+                <a:t>void </a:t>
+              </a:r>
+              <a:r>
+                <a:rPr lang="en-IE" sz="2800" dirty="0" err="1"/>
+                <a:t>printFullName</a:t>
+              </a:r>
+              <a:r>
+                <a:rPr lang="en-IE" sz="2800" dirty="0"/>
+                <a:t>()</a:t>
+              </a:r>
+            </a:p>
+          </p:txBody>
+        </p:sp>
+        <p:sp>
+          <p:nvSpPr>
+            <p:cNvPr id="10" name="Rectangle 9"/>
+            <p:cNvSpPr/>
+            <p:nvPr/>
+          </p:nvSpPr>
+          <p:spPr>
+            <a:xfrm>
+              <a:off x="7391399" y="1684232"/>
+              <a:ext cx="304800" cy="457200"/>
+            </a:xfrm>
+            <a:prstGeom prst="rect">
+              <a:avLst/>
+            </a:prstGeom>
+            <a:noFill/>
+            <a:ln>
+              <a:solidFill>
+                <a:srgbClr val="FF0000"/>
+              </a:solidFill>
+            </a:ln>
+          </p:spPr>
+          <p:style>
+            <a:lnRef idx="2">
+              <a:schemeClr val="accent1">
+                <a:shade val="50000"/>
+              </a:schemeClr>
+            </a:lnRef>
+            <a:fillRef idx="1">
+              <a:schemeClr val="accent1"/>
+            </a:fillRef>
+            <a:effectRef idx="0">
+              <a:schemeClr val="accent1"/>
+            </a:effectRef>
+            <a:fontRef idx="minor">
+              <a:schemeClr val="lt1"/>
+            </a:fontRef>
+          </p:style>
+          <p:txBody>
+            <a:bodyPr rtlCol="0" anchor="ctr"/>
+            <a:lstStyle/>
+            <a:p>
+              <a:pPr algn="ctr"/>
+              <a:endParaRPr lang="en-IE" sz="1800"/>
+            </a:p>
+          </p:txBody>
+        </p:sp>
+        <p:sp>
+          <p:nvSpPr>
+            <p:cNvPr id="13" name="Rectangle 12"/>
+            <p:cNvSpPr/>
+            <p:nvPr/>
+          </p:nvSpPr>
+          <p:spPr>
+            <a:xfrm>
+              <a:off x="7268971" y="2069653"/>
+              <a:ext cx="304800" cy="507611"/>
+            </a:xfrm>
+            <a:prstGeom prst="rect">
+              <a:avLst/>
+            </a:prstGeom>
+            <a:noFill/>
+            <a:ln>
+              <a:solidFill>
+                <a:srgbClr val="FF0000"/>
+              </a:solidFill>
+            </a:ln>
+          </p:spPr>
+          <p:style>
+            <a:lnRef idx="2">
+              <a:schemeClr val="accent1">
+                <a:shade val="50000"/>
+              </a:schemeClr>
+            </a:lnRef>
+            <a:fillRef idx="1">
+              <a:schemeClr val="accent1"/>
+            </a:fillRef>
+            <a:effectRef idx="0">
+              <a:schemeClr val="accent1"/>
+            </a:effectRef>
+            <a:fontRef idx="minor">
+              <a:schemeClr val="lt1"/>
+            </a:fontRef>
+          </p:style>
+          <p:txBody>
+            <a:bodyPr rtlCol="0" anchor="ctr"/>
+            <a:lstStyle/>
+            <a:p>
+              <a:pPr algn="ctr"/>
+              <a:endParaRPr lang="en-IE" sz="1800"/>
+            </a:p>
+          </p:txBody>
+        </p:sp>
+      </p:grpSp>
       <p:sp>
         <p:nvSpPr>
           <p:cNvPr id="5" name="TextBox 4"/>
@@ -9069,13 +9038,18 @@
         </p:nvSpPr>
         <p:spPr>
           <a:xfrm>
-            <a:off x="5689600" y="5354808"/>
+            <a:off x="5652168" y="5105400"/>
             <a:ext cx="5612434" cy="1569660"/>
           </a:xfrm>
           <a:prstGeom prst="rect">
             <a:avLst/>
           </a:prstGeom>
-          <a:noFill/>
+          <a:solidFill>
+            <a:schemeClr val="accent6">
+              <a:lumMod val="40000"/>
+              <a:lumOff val="60000"/>
+            </a:schemeClr>
+          </a:solidFill>
           <a:ln>
             <a:solidFill>
               <a:schemeClr val="accent1"/>
@@ -9254,7 +9228,7 @@
                 <a:latin typeface="Monaco"/>
                 <a:cs typeface="Arial" pitchFamily="34" charset="0"/>
               </a:rPr>
-              <a:t>strokeWeight</a:t>
+              <a:t>println</a:t>
             </a:r>
             <a:r>
               <a:rPr lang="en-US" altLang="en-US" sz="2800" dirty="0">
@@ -9264,7 +9238,27 @@
                 <a:latin typeface="Monaco"/>
                 <a:cs typeface="Arial" pitchFamily="34" charset="0"/>
               </a:rPr>
-              <a:t>(float weight)</a:t>
+              <a:t>(String </a:t>
+            </a:r>
+            <a:r>
+              <a:rPr lang="en-US" altLang="en-US" sz="2800" dirty="0" err="1">
+                <a:solidFill>
+                  <a:srgbClr val="000000"/>
+                </a:solidFill>
+                <a:latin typeface="Monaco"/>
+                <a:cs typeface="Arial" pitchFamily="34" charset="0"/>
+              </a:rPr>
+              <a:t>myString</a:t>
+            </a:r>
+            <a:r>
+              <a:rPr lang="en-US" altLang="en-US" sz="2800" dirty="0">
+                <a:solidFill>
+                  <a:srgbClr val="000000"/>
+                </a:solidFill>
+                <a:latin typeface="Monaco"/>
+                <a:cs typeface="Arial" pitchFamily="34" charset="0"/>
+              </a:rPr>
+              <a:t>)</a:t>
             </a:r>
           </a:p>
           <a:p>
@@ -9301,7 +9295,7 @@
                 <a:latin typeface="Monaco"/>
                 <a:cs typeface="Arial" pitchFamily="34" charset="0"/>
               </a:rPr>
-              <a:t>void size(</a:t>
+              <a:t>void </a:t>
             </a:r>
             <a:r>
               <a:rPr lang="en-US" altLang="en-US" sz="2800" dirty="0" err="1">
@@ -9311,7 +9305,7 @@
                 <a:latin typeface="Monaco"/>
                 <a:cs typeface="Arial" pitchFamily="34" charset="0"/>
               </a:rPr>
-              <a:t>int</a:t>
+              <a:t>printSum</a:t>
             </a:r>
             <a:r>
               <a:rPr lang="en-US" altLang="en-US" sz="2800" dirty="0">
@@ -9321,27 +9315,7 @@
                 <a:latin typeface="Monaco"/>
                 <a:cs typeface="Arial" pitchFamily="34" charset="0"/>
               </a:rPr>
-              <a:t> width, </a:t>
-            </a:r>
-            <a:r>
-              <a:rPr lang="en-US" altLang="en-US" sz="2800" dirty="0" err="1">
-                <a:solidFill>
-                  <a:srgbClr val="000000"/>
-                </a:solidFill>
-                <a:latin typeface="Monaco"/>
-                <a:cs typeface="Arial" pitchFamily="34" charset="0"/>
-              </a:rPr>
-              <a:t>int</a:t>
-            </a:r>
-            <a:r>
-              <a:rPr lang="en-US" altLang="en-US" sz="2800" dirty="0">
-                <a:solidFill>
-                  <a:srgbClr val="000000"/>
-                </a:solidFill>
-                <a:latin typeface="Monaco"/>
-                <a:cs typeface="Arial" pitchFamily="34" charset="0"/>
-              </a:rPr>
-              <a:t> height)</a:t>
+              <a:t>(int num1, int num2)</a:t>
             </a:r>
             <a:r>
               <a:rPr lang="en-US" altLang="en-US" sz="2800" dirty="0">
@@ -9396,7 +9370,7 @@
         <p:spPr>
           <a:xfrm>
             <a:off x="609601" y="3450401"/>
-            <a:ext cx="10058400" cy="2873009"/>
+            <a:ext cx="10058400" cy="3255199"/>
           </a:xfrm>
         </p:spPr>
         <p:txBody>
@@ -9438,15 +9412,7 @@
             </a:r>
             <a:r>
               <a:rPr lang="en-IE" sz="2000" dirty="0"/>
-              <a:t> (e.g. </a:t>
-            </a:r>
-            <a:r>
-              <a:rPr lang="en-IE" sz="2000" dirty="0" err="1"/>
-              <a:t>int</a:t>
-            </a:r>
-            <a:r>
-              <a:rPr lang="en-IE" sz="2000" dirty="0"/>
-              <a:t>) </a:t>
+              <a:t> (e.g. int) </a:t>
             </a:r>
             <a:br>
               <a:rPr lang="en-IE" sz="2000" dirty="0"/>
@@ -9461,7 +9427,7 @@
             </a:r>
             <a:r>
               <a:rPr lang="en-IE" sz="2000" dirty="0"/>
-              <a:t> (e.g. width). </a:t>
+              <a:t> (e.g. num1). </a:t>
             </a:r>
           </a:p>
           <a:p>
@@ -9474,7 +9440,7 @@
             </a:br>
             <a:r>
               <a:rPr lang="en-IE" sz="2400" dirty="0"/>
-              <a:t>we provide a parameter, so that the information can be passed into it. </a:t>
+              <a:t>we provide a parameter/s, so that the information can be passed into it. </a:t>
             </a:r>
           </a:p>
           <a:p>
@@ -9488,7 +9454,7 @@
                   <a:srgbClr val="FF0000"/>
                 </a:solidFill>
               </a:rPr>
-              <a:t>strokeWeight</a:t>
+              <a:t>println</a:t>
             </a:r>
             <a:r>
               <a:rPr lang="en-IE" sz="2400" dirty="0"/>
@@ -9509,15 +9475,15 @@
               <a:t>The second method </a:t>
             </a:r>
             <a:r>
-              <a:rPr lang="en-IE" sz="2400" i="1">
+              <a:rPr lang="en-IE" sz="2400" i="1" dirty="0" err="1">
                 <a:solidFill>
                   <a:srgbClr val="FF0000"/>
                 </a:solidFill>
               </a:rPr>
-              <a:t>size</a:t>
-            </a:r>
-            <a:r>
-              <a:rPr lang="en-IE" sz="2400"/>
+              <a:t>printSum</a:t>
+            </a:r>
+            <a:r>
+              <a:rPr lang="en-IE" sz="2400" dirty="0"/>
               <a:t> has </a:t>
             </a:r>
             <a:r>
@@ -9545,8 +9511,8 @@
         </p:nvSpPr>
         <p:spPr>
           <a:xfrm>
-            <a:off x="6350000" y="1676399"/>
-            <a:ext cx="2590800" cy="564588"/>
+            <a:off x="5105400" y="1676399"/>
+            <a:ext cx="3657600" cy="564588"/>
           </a:xfrm>
           <a:prstGeom prst="rect">
             <a:avLst/>
@@ -9591,7 +9557,7 @@
         </p:nvSpPr>
         <p:spPr>
           <a:xfrm>
-            <a:off x="4724400" y="2514600"/>
+            <a:off x="5326693" y="2504777"/>
             <a:ext cx="4419600" cy="583809"/>
           </a:xfrm>
           <a:prstGeom prst="rect">
@@ -9646,7 +9612,7 @@
         <p:spPr>
           <a:xfrm flipV="1">
             <a:off x="2743200" y="2936165"/>
-            <a:ext cx="2286000" cy="1102435"/>
+            <a:ext cx="2895601" cy="1102435"/>
           </a:xfrm>
           <a:prstGeom prst="straightConnector1">
             <a:avLst/>
@@ -9689,8 +9655,8 @@
         </p:nvCxnSpPr>
         <p:spPr>
           <a:xfrm flipV="1">
-            <a:off x="2743200" y="2919131"/>
-            <a:ext cx="3460749" cy="1424269"/>
+            <a:off x="2743200" y="2936165"/>
+            <a:ext cx="3886200" cy="1407235"/>
           </a:xfrm>
           <a:prstGeom prst="straightConnector1">
             <a:avLst/>

--- a/topic07-methods/unit-1/talk-0-methods-terminology/methods-terminology.pptx
+++ b/topic07-methods/unit-1/talk-0-methods-terminology/methods-terminology.pptx
@@ -2,7 +2,7 @@
 <file path=ppt/presentation.xml><?xml version="1.0" encoding="utf-8"?>
 <p:presentation xmlns:a="http://schemas.openxmlformats.org/drawingml/2006/main" xmlns:r="http://schemas.openxmlformats.org/officeDocument/2006/relationships" xmlns:p="http://schemas.openxmlformats.org/presentationml/2006/main" saveSubsetFonts="1">
   <p:sldMasterIdLst>
-    <p:sldMasterId id="2147483660" r:id="rId1"/>
+    <p:sldMasterId id="2147483673" r:id="rId1"/>
   </p:sldMasterIdLst>
   <p:notesMasterIdLst>
     <p:notesMasterId r:id="rId21"/>
@@ -1269,7 +1269,7 @@
           <a:lstStyle/>
           <a:p>
             <a:r>
-              <a:rPr lang="en-US"/>
+              <a:rPr lang="en-GB"/>
               <a:t>Click to edit Master title style</a:t>
             </a:r>
             <a:endParaRPr lang="en-US" dirty="0"/>
@@ -1388,7 +1388,7 @@
           </a:lstStyle>
           <a:p>
             <a:r>
-              <a:rPr lang="en-US"/>
+              <a:rPr lang="en-GB"/>
               <a:t>Click to edit Master subtitle style</a:t>
             </a:r>
             <a:endParaRPr lang="en-US" dirty="0"/>
@@ -1465,7 +1465,7 @@
     </p:spTree>
     <p:extLst>
       <p:ext uri="{BB962C8B-B14F-4D97-AF65-F5344CB8AC3E}">
-        <p14:creationId xmlns:p14="http://schemas.microsoft.com/office/powerpoint/2010/main" val="3705794364"/>
+        <p14:creationId xmlns:p14="http://schemas.microsoft.com/office/powerpoint/2010/main" val="3763913890"/>
       </p:ext>
     </p:extLst>
   </p:cSld>
@@ -1508,9 +1508,10 @@
           <a:lstStyle/>
           <a:p>
             <a:r>
-              <a:rPr lang="en-US"/>
+              <a:rPr lang="en-GB"/>
               <a:t>Click to edit Master title style</a:t>
             </a:r>
+            <a:endParaRPr lang="en-US"/>
           </a:p>
         </p:txBody>
       </p:sp>
@@ -1531,37 +1532,38 @@
           <a:p>
             <a:pPr lvl="0"/>
             <a:r>
-              <a:rPr lang="en-US"/>
+              <a:rPr lang="en-GB"/>
               <a:t>Click to edit Master text styles</a:t>
             </a:r>
           </a:p>
           <a:p>
             <a:pPr lvl="1"/>
             <a:r>
-              <a:rPr lang="en-US"/>
+              <a:rPr lang="en-GB"/>
               <a:t>Second level</a:t>
             </a:r>
           </a:p>
           <a:p>
             <a:pPr lvl="2"/>
             <a:r>
-              <a:rPr lang="en-US"/>
+              <a:rPr lang="en-GB"/>
               <a:t>Third level</a:t>
             </a:r>
           </a:p>
           <a:p>
             <a:pPr lvl="3"/>
             <a:r>
-              <a:rPr lang="en-US"/>
+              <a:rPr lang="en-GB"/>
               <a:t>Fourth level</a:t>
             </a:r>
           </a:p>
           <a:p>
             <a:pPr lvl="4"/>
             <a:r>
-              <a:rPr lang="en-US"/>
+              <a:rPr lang="en-GB"/>
               <a:t>Fifth level</a:t>
             </a:r>
+            <a:endParaRPr lang="en-US"/>
           </a:p>
         </p:txBody>
       </p:sp>
@@ -1635,7 +1637,7 @@
     </p:spTree>
     <p:extLst>
       <p:ext uri="{BB962C8B-B14F-4D97-AF65-F5344CB8AC3E}">
-        <p14:creationId xmlns:p14="http://schemas.microsoft.com/office/powerpoint/2010/main" val="3616110552"/>
+        <p14:creationId xmlns:p14="http://schemas.microsoft.com/office/powerpoint/2010/main" val="2709981022"/>
       </p:ext>
     </p:extLst>
   </p:cSld>
@@ -1683,9 +1685,10 @@
           <a:lstStyle/>
           <a:p>
             <a:r>
-              <a:rPr lang="en-US"/>
+              <a:rPr lang="en-GB"/>
               <a:t>Click to edit Master title style</a:t>
             </a:r>
+            <a:endParaRPr lang="en-US"/>
           </a:p>
         </p:txBody>
       </p:sp>
@@ -1711,37 +1714,38 @@
           <a:p>
             <a:pPr lvl="0"/>
             <a:r>
-              <a:rPr lang="en-US"/>
+              <a:rPr lang="en-GB"/>
               <a:t>Click to edit Master text styles</a:t>
             </a:r>
           </a:p>
           <a:p>
             <a:pPr lvl="1"/>
             <a:r>
-              <a:rPr lang="en-US"/>
+              <a:rPr lang="en-GB"/>
               <a:t>Second level</a:t>
             </a:r>
           </a:p>
           <a:p>
             <a:pPr lvl="2"/>
             <a:r>
-              <a:rPr lang="en-US"/>
+              <a:rPr lang="en-GB"/>
               <a:t>Third level</a:t>
             </a:r>
           </a:p>
           <a:p>
             <a:pPr lvl="3"/>
             <a:r>
-              <a:rPr lang="en-US"/>
+              <a:rPr lang="en-GB"/>
               <a:t>Fourth level</a:t>
             </a:r>
           </a:p>
           <a:p>
             <a:pPr lvl="4"/>
             <a:r>
-              <a:rPr lang="en-US"/>
+              <a:rPr lang="en-GB"/>
               <a:t>Fifth level</a:t>
             </a:r>
+            <a:endParaRPr lang="en-US"/>
           </a:p>
         </p:txBody>
       </p:sp>
@@ -1815,7 +1819,7 @@
     </p:spTree>
     <p:extLst>
       <p:ext uri="{BB962C8B-B14F-4D97-AF65-F5344CB8AC3E}">
-        <p14:creationId xmlns:p14="http://schemas.microsoft.com/office/powerpoint/2010/main" val="2137625442"/>
+        <p14:creationId xmlns:p14="http://schemas.microsoft.com/office/powerpoint/2010/main" val="3267198393"/>
       </p:ext>
     </p:extLst>
   </p:cSld>
@@ -1826,6 +1830,147 @@
 </file>
 
 <file path=ppt/slideLayouts/slideLayout12.xml><?xml version="1.0" encoding="utf-8"?>
+<p:sldLayout xmlns:a="http://schemas.openxmlformats.org/drawingml/2006/main" xmlns:r="http://schemas.openxmlformats.org/officeDocument/2006/relationships" xmlns:p="http://schemas.openxmlformats.org/presentationml/2006/main" type="tx">
+  <p:cSld name="Title &amp; Bullets">
+    <p:spTree>
+      <p:nvGrpSpPr>
+        <p:cNvPr id="1" name=""/>
+        <p:cNvGrpSpPr/>
+        <p:nvPr/>
+      </p:nvGrpSpPr>
+      <p:grpSpPr>
+        <a:xfrm>
+          <a:off x="0" y="0"/>
+          <a:ext cx="0" cy="0"/>
+          <a:chOff x="0" y="0"/>
+          <a:chExt cx="0" cy="0"/>
+        </a:xfrm>
+      </p:grpSpPr>
+      <p:sp>
+        <p:nvSpPr>
+          <p:cNvPr id="22" name="Shape 22"/>
+          <p:cNvSpPr>
+            <a:spLocks noGrp="1"/>
+          </p:cNvSpPr>
+          <p:nvPr>
+            <p:ph type="title"/>
+          </p:nvPr>
+        </p:nvSpPr>
+        <p:spPr>
+          <a:prstGeom prst="rect">
+            <a:avLst/>
+          </a:prstGeom>
+        </p:spPr>
+        <p:txBody>
+          <a:bodyPr/>
+          <a:lstStyle/>
+          <a:p>
+            <a:r>
+              <a:rPr lang="en-GB"/>
+              <a:t>Click to edit Master title style</a:t>
+            </a:r>
+            <a:endParaRPr/>
+          </a:p>
+        </p:txBody>
+      </p:sp>
+      <p:sp>
+        <p:nvSpPr>
+          <p:cNvPr id="23" name="Shape 23"/>
+          <p:cNvSpPr>
+            <a:spLocks noGrp="1"/>
+          </p:cNvSpPr>
+          <p:nvPr>
+            <p:ph type="body" idx="1"/>
+          </p:nvPr>
+        </p:nvSpPr>
+        <p:spPr>
+          <a:prstGeom prst="rect">
+            <a:avLst/>
+          </a:prstGeom>
+        </p:spPr>
+        <p:txBody>
+          <a:bodyPr/>
+          <a:lstStyle/>
+          <a:p>
+            <a:pPr lvl="0"/>
+            <a:r>
+              <a:rPr lang="en-GB"/>
+              <a:t>Click to edit Master text styles</a:t>
+            </a:r>
+          </a:p>
+          <a:p>
+            <a:pPr lvl="1"/>
+            <a:r>
+              <a:rPr lang="en-GB"/>
+              <a:t>Second level</a:t>
+            </a:r>
+          </a:p>
+          <a:p>
+            <a:pPr lvl="2"/>
+            <a:r>
+              <a:rPr lang="en-GB"/>
+              <a:t>Third level</a:t>
+            </a:r>
+          </a:p>
+          <a:p>
+            <a:pPr lvl="3"/>
+            <a:r>
+              <a:rPr lang="en-GB"/>
+              <a:t>Fourth level</a:t>
+            </a:r>
+          </a:p>
+          <a:p>
+            <a:pPr lvl="4"/>
+            <a:r>
+              <a:rPr lang="en-GB"/>
+              <a:t>Fifth level</a:t>
+            </a:r>
+            <a:endParaRPr/>
+          </a:p>
+        </p:txBody>
+      </p:sp>
+      <p:sp>
+        <p:nvSpPr>
+          <p:cNvPr id="24" name="Shape 24"/>
+          <p:cNvSpPr>
+            <a:spLocks noGrp="1"/>
+          </p:cNvSpPr>
+          <p:nvPr>
+            <p:ph type="sldNum" sz="quarter" idx="2"/>
+          </p:nvPr>
+        </p:nvSpPr>
+        <p:spPr>
+          <a:prstGeom prst="rect">
+            <a:avLst/>
+          </a:prstGeom>
+        </p:spPr>
+        <p:txBody>
+          <a:bodyPr/>
+          <a:lstStyle/>
+          <a:p>
+            <a:fld id="{B6F15528-21DE-4FAA-801E-634DDDAF4B2B}" type="slidenum">
+              <a:rPr lang="en-US" smtClean="0"/>
+              <a:pPr/>
+              <a:t>‹#›</a:t>
+            </a:fld>
+            <a:endParaRPr lang="en-US"/>
+          </a:p>
+        </p:txBody>
+      </p:sp>
+    </p:spTree>
+    <p:extLst>
+      <p:ext uri="{BB962C8B-B14F-4D97-AF65-F5344CB8AC3E}">
+        <p14:creationId xmlns:p14="http://schemas.microsoft.com/office/powerpoint/2010/main" val="2766740374"/>
+      </p:ext>
+    </p:extLst>
+  </p:cSld>
+  <p:clrMapOvr>
+    <a:masterClrMapping/>
+  </p:clrMapOvr>
+</p:sldLayout>
+</file>
+
+<file path=ppt/slideLayouts/slideLayout13.xml><?xml version="1.0" encoding="utf-8"?>
 <p:sldLayout xmlns:a="http://schemas.openxmlformats.org/drawingml/2006/main" xmlns:r="http://schemas.openxmlformats.org/officeDocument/2006/relationships" xmlns:p="http://schemas.openxmlformats.org/presentationml/2006/main" showMasterSp="0">
   <p:cSld name="1_Title Slide">
     <p:spTree>
@@ -1866,7 +2011,7 @@
           <a:lstStyle/>
           <a:p>
             <a:r>
-              <a:rPr lang="en-US"/>
+              <a:rPr lang="en-GB"/>
               <a:t>Click to edit Master title style</a:t>
             </a:r>
             <a:endParaRPr dirty="0"/>
@@ -1915,7 +2060,7 @@
           <a:p>
             <a:pPr lvl="0"/>
             <a:r>
-              <a:rPr lang="en-US"/>
+              <a:rPr lang="en-GB"/>
               <a:t>Click to edit Master text styles</a:t>
             </a:r>
           </a:p>
@@ -1960,7 +2105,7 @@
     </p:spTree>
     <p:extLst>
       <p:ext uri="{BB962C8B-B14F-4D97-AF65-F5344CB8AC3E}">
-        <p14:creationId xmlns:p14="http://schemas.microsoft.com/office/powerpoint/2010/main" val="4254776295"/>
+        <p14:creationId xmlns:p14="http://schemas.microsoft.com/office/powerpoint/2010/main" val="1493708878"/>
       </p:ext>
     </p:extLst>
   </p:cSld>
@@ -1968,6 +2113,269 @@
     <a:masterClrMapping/>
   </p:clrMapOvr>
   <p:transition spd="med"/>
+</p:sldLayout>
+</file>
+
+<file path=ppt/slideLayouts/slideLayout14.xml><?xml version="1.0" encoding="utf-8"?>
+<p:sldLayout xmlns:a="http://schemas.openxmlformats.org/drawingml/2006/main" xmlns:r="http://schemas.openxmlformats.org/officeDocument/2006/relationships" xmlns:p="http://schemas.openxmlformats.org/presentationml/2006/main" type="tx">
+  <p:cSld name="Title and Box">
+    <p:spTree>
+      <p:nvGrpSpPr>
+        <p:cNvPr id="1" name=""/>
+        <p:cNvGrpSpPr/>
+        <p:nvPr/>
+      </p:nvGrpSpPr>
+      <p:grpSpPr>
+        <a:xfrm>
+          <a:off x="0" y="0"/>
+          <a:ext cx="0" cy="0"/>
+          <a:chOff x="0" y="0"/>
+          <a:chExt cx="0" cy="0"/>
+        </a:xfrm>
+      </p:grpSpPr>
+      <p:sp>
+        <p:nvSpPr>
+          <p:cNvPr id="33" name="Slide Number"/>
+          <p:cNvSpPr txBox="1">
+            <a:spLocks noGrp="1"/>
+          </p:cNvSpPr>
+          <p:nvPr>
+            <p:ph type="sldNum" sz="quarter" idx="2"/>
+          </p:nvPr>
+        </p:nvSpPr>
+        <p:spPr>
+          <a:xfrm>
+            <a:off x="11691066" y="6493542"/>
+            <a:ext cx="434734" cy="430885"/>
+          </a:xfrm>
+          <a:prstGeom prst="rect">
+            <a:avLst/>
+          </a:prstGeom>
+        </p:spPr>
+        <p:txBody>
+          <a:bodyPr/>
+          <a:lstStyle/>
+          <a:p>
+            <a:fld id="{B6F15528-21DE-4FAA-801E-634DDDAF4B2B}" type="slidenum">
+              <a:rPr lang="en-US" smtClean="0"/>
+              <a:pPr/>
+              <a:t>‹#›</a:t>
+            </a:fld>
+            <a:endParaRPr lang="en-US"/>
+          </a:p>
+        </p:txBody>
+      </p:sp>
+      <p:sp>
+        <p:nvSpPr>
+          <p:cNvPr id="34" name="Title Text"/>
+          <p:cNvSpPr txBox="1">
+            <a:spLocks noGrp="1"/>
+          </p:cNvSpPr>
+          <p:nvPr>
+            <p:ph type="title"/>
+          </p:nvPr>
+        </p:nvSpPr>
+        <p:spPr>
+          <a:xfrm>
+            <a:off x="729736" y="395556"/>
+            <a:ext cx="10747254" cy="1143001"/>
+          </a:xfrm>
+          <a:prstGeom prst="rect">
+            <a:avLst/>
+          </a:prstGeom>
+        </p:spPr>
+        <p:txBody>
+          <a:bodyPr/>
+          <a:lstStyle/>
+          <a:p>
+            <a:r>
+              <a:rPr lang="en-GB"/>
+              <a:t>Click to edit Master title style</a:t>
+            </a:r>
+            <a:endParaRPr/>
+          </a:p>
+        </p:txBody>
+      </p:sp>
+    </p:spTree>
+    <p:extLst>
+      <p:ext uri="{BB962C8B-B14F-4D97-AF65-F5344CB8AC3E}">
+        <p14:creationId xmlns:p14="http://schemas.microsoft.com/office/powerpoint/2010/main" val="867630662"/>
+      </p:ext>
+    </p:extLst>
+  </p:cSld>
+  <p:clrMapOvr>
+    <a:masterClrMapping/>
+  </p:clrMapOvr>
+  <p:transition spd="med"/>
+</p:sldLayout>
+</file>
+
+<file path=ppt/slideLayouts/slideLayout15.xml><?xml version="1.0" encoding="utf-8"?>
+<p:sldLayout xmlns:a="http://schemas.openxmlformats.org/drawingml/2006/main" xmlns:r="http://schemas.openxmlformats.org/officeDocument/2006/relationships" xmlns:p="http://schemas.openxmlformats.org/presentationml/2006/main" type="txAndChart">
+  <p:cSld name="Title, Text and Chart">
+    <p:spTree>
+      <p:nvGrpSpPr>
+        <p:cNvPr id="1" name=""/>
+        <p:cNvGrpSpPr/>
+        <p:nvPr/>
+      </p:nvGrpSpPr>
+      <p:grpSpPr>
+        <a:xfrm>
+          <a:off x="0" y="0"/>
+          <a:ext cx="0" cy="0"/>
+          <a:chOff x="0" y="0"/>
+          <a:chExt cx="0" cy="0"/>
+        </a:xfrm>
+      </p:grpSpPr>
+      <p:sp>
+        <p:nvSpPr>
+          <p:cNvPr id="2" name="Title 1"/>
+          <p:cNvSpPr>
+            <a:spLocks noGrp="1"/>
+          </p:cNvSpPr>
+          <p:nvPr>
+            <p:ph type="title"/>
+          </p:nvPr>
+        </p:nvSpPr>
+        <p:spPr>
+          <a:xfrm>
+            <a:off x="1320800" y="381000"/>
+            <a:ext cx="10363200" cy="1143000"/>
+          </a:xfrm>
+        </p:spPr>
+        <p:txBody>
+          <a:bodyPr/>
+          <a:lstStyle/>
+          <a:p>
+            <a:r>
+              <a:rPr lang="en-GB"/>
+              <a:t>Click to edit Master title style</a:t>
+            </a:r>
+            <a:endParaRPr lang="en-US"/>
+          </a:p>
+        </p:txBody>
+      </p:sp>
+      <p:sp>
+        <p:nvSpPr>
+          <p:cNvPr id="3" name="Text Placeholder 2"/>
+          <p:cNvSpPr>
+            <a:spLocks noGrp="1"/>
+          </p:cNvSpPr>
+          <p:nvPr>
+            <p:ph type="body" sz="half" idx="1"/>
+          </p:nvPr>
+        </p:nvSpPr>
+        <p:spPr>
+          <a:xfrm>
+            <a:off x="1625600" y="1828800"/>
+            <a:ext cx="4876800" cy="4267200"/>
+          </a:xfrm>
+        </p:spPr>
+        <p:txBody>
+          <a:bodyPr/>
+          <a:lstStyle/>
+          <a:p>
+            <a:pPr lvl="0"/>
+            <a:r>
+              <a:rPr lang="en-GB"/>
+              <a:t>Click to edit Master text styles</a:t>
+            </a:r>
+          </a:p>
+          <a:p>
+            <a:pPr lvl="1"/>
+            <a:r>
+              <a:rPr lang="en-GB"/>
+              <a:t>Second level</a:t>
+            </a:r>
+          </a:p>
+          <a:p>
+            <a:pPr lvl="2"/>
+            <a:r>
+              <a:rPr lang="en-GB"/>
+              <a:t>Third level</a:t>
+            </a:r>
+          </a:p>
+          <a:p>
+            <a:pPr lvl="3"/>
+            <a:r>
+              <a:rPr lang="en-GB"/>
+              <a:t>Fourth level</a:t>
+            </a:r>
+          </a:p>
+          <a:p>
+            <a:pPr lvl="4"/>
+            <a:r>
+              <a:rPr lang="en-GB"/>
+              <a:t>Fifth level</a:t>
+            </a:r>
+            <a:endParaRPr lang="en-US"/>
+          </a:p>
+        </p:txBody>
+      </p:sp>
+      <p:sp>
+        <p:nvSpPr>
+          <p:cNvPr id="4" name="Chart Placeholder 3"/>
+          <p:cNvSpPr>
+            <a:spLocks noGrp="1"/>
+          </p:cNvSpPr>
+          <p:nvPr>
+            <p:ph type="chart" sz="half" idx="2"/>
+          </p:nvPr>
+        </p:nvSpPr>
+        <p:spPr>
+          <a:xfrm>
+            <a:off x="6705600" y="1828800"/>
+            <a:ext cx="4876800" cy="4267200"/>
+          </a:xfrm>
+        </p:spPr>
+        <p:txBody>
+          <a:bodyPr/>
+          <a:lstStyle/>
+          <a:p>
+            <a:pPr lvl="0"/>
+            <a:r>
+              <a:rPr lang="en-GB" noProof="0"/>
+              <a:t>Click icon to add chart</a:t>
+            </a:r>
+            <a:endParaRPr lang="en-US" noProof="0"/>
+          </a:p>
+        </p:txBody>
+      </p:sp>
+      <p:sp>
+        <p:nvSpPr>
+          <p:cNvPr id="5" name="Rectangle 1028"/>
+          <p:cNvSpPr>
+            <a:spLocks noGrp="1" noChangeArrowheads="1"/>
+          </p:cNvSpPr>
+          <p:nvPr>
+            <p:ph type="ftr" sz="quarter" idx="10"/>
+          </p:nvPr>
+        </p:nvSpPr>
+        <p:spPr>
+          <a:ln/>
+        </p:spPr>
+        <p:txBody>
+          <a:bodyPr/>
+          <a:lstStyle>
+            <a:lvl1pPr>
+              <a:defRPr/>
+            </a:lvl1pPr>
+          </a:lstStyle>
+          <a:p>
+            <a:endParaRPr lang="en-US"/>
+          </a:p>
+        </p:txBody>
+      </p:sp>
+    </p:spTree>
+    <p:extLst>
+      <p:ext uri="{BB962C8B-B14F-4D97-AF65-F5344CB8AC3E}">
+        <p14:creationId xmlns:p14="http://schemas.microsoft.com/office/powerpoint/2010/main" val="2161410753"/>
+      </p:ext>
+    </p:extLst>
+  </p:cSld>
+  <p:clrMapOvr>
+    <a:masterClrMapping/>
+  </p:clrMapOvr>
 </p:sldLayout>
 </file>
 
@@ -2015,7 +2423,7 @@
           </a:lstStyle>
           <a:p>
             <a:r>
-              <a:rPr lang="en-US"/>
+              <a:rPr lang="en-GB"/>
               <a:t>Click to edit Master title style</a:t>
             </a:r>
             <a:endParaRPr lang="en-US" dirty="0"/>
@@ -2039,37 +2447,38 @@
           <a:p>
             <a:pPr lvl="0"/>
             <a:r>
-              <a:rPr lang="en-US"/>
+              <a:rPr lang="en-GB"/>
               <a:t>Click to edit Master text styles</a:t>
             </a:r>
           </a:p>
           <a:p>
             <a:pPr lvl="1"/>
             <a:r>
-              <a:rPr lang="en-US"/>
+              <a:rPr lang="en-GB"/>
               <a:t>Second level</a:t>
             </a:r>
           </a:p>
           <a:p>
             <a:pPr lvl="2"/>
             <a:r>
-              <a:rPr lang="en-US"/>
+              <a:rPr lang="en-GB"/>
               <a:t>Third level</a:t>
             </a:r>
           </a:p>
           <a:p>
             <a:pPr lvl="3"/>
             <a:r>
-              <a:rPr lang="en-US"/>
+              <a:rPr lang="en-GB"/>
               <a:t>Fourth level</a:t>
             </a:r>
           </a:p>
           <a:p>
             <a:pPr lvl="4"/>
             <a:r>
-              <a:rPr lang="en-US"/>
+              <a:rPr lang="en-GB"/>
               <a:t>Fifth level</a:t>
             </a:r>
+            <a:endParaRPr lang="en-US"/>
           </a:p>
         </p:txBody>
       </p:sp>
@@ -2183,7 +2592,183 @@
           <p:cNvPr id="8" name="Straight Connector 7">
             <a:extLst>
               <a:ext uri="{FF2B5EF4-FFF2-40B4-BE49-F238E27FC236}">
-                <a16:creationId xmlns:a16="http://schemas.microsoft.com/office/drawing/2014/main" id="{CCBEEAA7-DFCE-0F70-7029-A699F0BA819F}"/>
+                <a16:creationId xmlns:a16="http://schemas.microsoft.com/office/drawing/2014/main" id="{A54FA624-7CFC-3CFB-8384-E3FA99B20E94}"/>
+              </a:ext>
+            </a:extLst>
+          </p:cNvPr>
+          <p:cNvCxnSpPr/>
+          <p:nvPr/>
+        </p:nvCxnSpPr>
+        <p:spPr>
+          <a:xfrm>
+            <a:off x="609600" y="1447800"/>
+            <a:ext cx="11074400" cy="0"/>
+          </a:xfrm>
+          <a:prstGeom prst="line">
+            <a:avLst/>
+          </a:prstGeom>
+          <a:ln w="12700">
+            <a:solidFill>
+              <a:schemeClr val="tx1">
+                <a:lumMod val="50000"/>
+                <a:lumOff val="50000"/>
+              </a:schemeClr>
+            </a:solidFill>
+          </a:ln>
+        </p:spPr>
+        <p:style>
+          <a:lnRef idx="1">
+            <a:schemeClr val="accent1"/>
+          </a:lnRef>
+          <a:fillRef idx="0">
+            <a:schemeClr val="accent1"/>
+          </a:fillRef>
+          <a:effectRef idx="0">
+            <a:schemeClr val="accent1"/>
+          </a:effectRef>
+          <a:fontRef idx="minor">
+            <a:schemeClr val="tx1"/>
+          </a:fontRef>
+        </p:style>
+      </p:cxnSp>
+      <p:cxnSp>
+        <p:nvCxnSpPr>
+          <p:cNvPr id="9" name="Straight Connector 8">
+            <a:extLst>
+              <a:ext uri="{FF2B5EF4-FFF2-40B4-BE49-F238E27FC236}">
+                <a16:creationId xmlns:a16="http://schemas.microsoft.com/office/drawing/2014/main" id="{9C51F014-A304-3672-EB37-723E4843A104}"/>
+              </a:ext>
+            </a:extLst>
+          </p:cNvPr>
+          <p:cNvCxnSpPr/>
+          <p:nvPr/>
+        </p:nvCxnSpPr>
+        <p:spPr>
+          <a:xfrm>
+            <a:off x="609600" y="1447800"/>
+            <a:ext cx="11074400" cy="0"/>
+          </a:xfrm>
+          <a:prstGeom prst="line">
+            <a:avLst/>
+          </a:prstGeom>
+          <a:ln w="12700">
+            <a:solidFill>
+              <a:schemeClr val="tx1">
+                <a:lumMod val="50000"/>
+                <a:lumOff val="50000"/>
+              </a:schemeClr>
+            </a:solidFill>
+          </a:ln>
+        </p:spPr>
+        <p:style>
+          <a:lnRef idx="1">
+            <a:schemeClr val="accent1"/>
+          </a:lnRef>
+          <a:fillRef idx="0">
+            <a:schemeClr val="accent1"/>
+          </a:fillRef>
+          <a:effectRef idx="0">
+            <a:schemeClr val="accent1"/>
+          </a:effectRef>
+          <a:fontRef idx="minor">
+            <a:schemeClr val="tx1"/>
+          </a:fontRef>
+        </p:style>
+      </p:cxnSp>
+      <p:cxnSp>
+        <p:nvCxnSpPr>
+          <p:cNvPr id="10" name="Straight Connector 9">
+            <a:extLst>
+              <a:ext uri="{FF2B5EF4-FFF2-40B4-BE49-F238E27FC236}">
+                <a16:creationId xmlns:a16="http://schemas.microsoft.com/office/drawing/2014/main" id="{1577319E-D913-0186-1403-29DAAB909981}"/>
+              </a:ext>
+            </a:extLst>
+          </p:cNvPr>
+          <p:cNvCxnSpPr/>
+          <p:nvPr/>
+        </p:nvCxnSpPr>
+        <p:spPr>
+          <a:xfrm>
+            <a:off x="609600" y="1447800"/>
+            <a:ext cx="11074400" cy="0"/>
+          </a:xfrm>
+          <a:prstGeom prst="line">
+            <a:avLst/>
+          </a:prstGeom>
+          <a:ln w="12700">
+            <a:solidFill>
+              <a:schemeClr val="tx1">
+                <a:lumMod val="50000"/>
+                <a:lumOff val="50000"/>
+              </a:schemeClr>
+            </a:solidFill>
+          </a:ln>
+        </p:spPr>
+        <p:style>
+          <a:lnRef idx="1">
+            <a:schemeClr val="accent1"/>
+          </a:lnRef>
+          <a:fillRef idx="0">
+            <a:schemeClr val="accent1"/>
+          </a:fillRef>
+          <a:effectRef idx="0">
+            <a:schemeClr val="accent1"/>
+          </a:effectRef>
+          <a:fontRef idx="minor">
+            <a:schemeClr val="tx1"/>
+          </a:fontRef>
+        </p:style>
+      </p:cxnSp>
+      <p:cxnSp>
+        <p:nvCxnSpPr>
+          <p:cNvPr id="11" name="Straight Connector 10">
+            <a:extLst>
+              <a:ext uri="{FF2B5EF4-FFF2-40B4-BE49-F238E27FC236}">
+                <a16:creationId xmlns:a16="http://schemas.microsoft.com/office/drawing/2014/main" id="{BE1E79F1-A6BC-9BFA-D91F-EDE58012F586}"/>
+              </a:ext>
+            </a:extLst>
+          </p:cNvPr>
+          <p:cNvCxnSpPr/>
+          <p:nvPr/>
+        </p:nvCxnSpPr>
+        <p:spPr>
+          <a:xfrm>
+            <a:off x="609600" y="1447800"/>
+            <a:ext cx="11074400" cy="0"/>
+          </a:xfrm>
+          <a:prstGeom prst="line">
+            <a:avLst/>
+          </a:prstGeom>
+          <a:ln w="12700">
+            <a:solidFill>
+              <a:schemeClr val="tx1">
+                <a:lumMod val="50000"/>
+                <a:lumOff val="50000"/>
+              </a:schemeClr>
+            </a:solidFill>
+          </a:ln>
+        </p:spPr>
+        <p:style>
+          <a:lnRef idx="1">
+            <a:schemeClr val="accent1"/>
+          </a:lnRef>
+          <a:fillRef idx="0">
+            <a:schemeClr val="accent1"/>
+          </a:fillRef>
+          <a:effectRef idx="0">
+            <a:schemeClr val="accent1"/>
+          </a:effectRef>
+          <a:fontRef idx="minor">
+            <a:schemeClr val="tx1"/>
+          </a:fontRef>
+        </p:style>
+      </p:cxnSp>
+      <p:cxnSp>
+        <p:nvCxnSpPr>
+          <p:cNvPr id="12" name="Straight Connector 11">
+            <a:extLst>
+              <a:ext uri="{FF2B5EF4-FFF2-40B4-BE49-F238E27FC236}">
+                <a16:creationId xmlns:a16="http://schemas.microsoft.com/office/drawing/2014/main" id="{AA05D465-0CF2-0C9C-A87E-6B7186C8FB3E}"/>
               </a:ext>
             </a:extLst>
           </p:cNvPr>
@@ -2225,7 +2810,7 @@
     </p:spTree>
     <p:extLst>
       <p:ext uri="{BB962C8B-B14F-4D97-AF65-F5344CB8AC3E}">
-        <p14:creationId xmlns:p14="http://schemas.microsoft.com/office/powerpoint/2010/main" val="2511264391"/>
+        <p14:creationId xmlns:p14="http://schemas.microsoft.com/office/powerpoint/2010/main" val="2897452111"/>
       </p:ext>
     </p:extLst>
   </p:cSld>
@@ -2277,9 +2862,10 @@
           </a:lstStyle>
           <a:p>
             <a:r>
-              <a:rPr lang="en-US"/>
+              <a:rPr lang="en-GB"/>
               <a:t>Click to edit Master title style</a:t>
             </a:r>
+            <a:endParaRPr lang="en-US"/>
           </a:p>
         </p:txBody>
       </p:sp>
@@ -2396,7 +2982,7 @@
           <a:p>
             <a:pPr lvl="0"/>
             <a:r>
-              <a:rPr lang="en-US"/>
+              <a:rPr lang="en-GB"/>
               <a:t>Click to edit Master text styles</a:t>
             </a:r>
           </a:p>
@@ -2472,7 +3058,7 @@
     </p:spTree>
     <p:extLst>
       <p:ext uri="{BB962C8B-B14F-4D97-AF65-F5344CB8AC3E}">
-        <p14:creationId xmlns:p14="http://schemas.microsoft.com/office/powerpoint/2010/main" val="823681451"/>
+        <p14:creationId xmlns:p14="http://schemas.microsoft.com/office/powerpoint/2010/main" val="3058699714"/>
       </p:ext>
     </p:extLst>
   </p:cSld>
@@ -2526,7 +3112,7 @@
           </a:lstStyle>
           <a:p>
             <a:r>
-              <a:rPr lang="en-US"/>
+              <a:rPr lang="en-GB"/>
               <a:t>Click to edit Master title style</a:t>
             </a:r>
             <a:endParaRPr lang="en-US" dirty="0"/>
@@ -2583,37 +3169,38 @@
           <a:p>
             <a:pPr lvl="0"/>
             <a:r>
-              <a:rPr lang="en-US"/>
+              <a:rPr lang="en-GB"/>
               <a:t>Click to edit Master text styles</a:t>
             </a:r>
           </a:p>
           <a:p>
             <a:pPr lvl="1"/>
             <a:r>
-              <a:rPr lang="en-US"/>
+              <a:rPr lang="en-GB"/>
               <a:t>Second level</a:t>
             </a:r>
           </a:p>
           <a:p>
             <a:pPr lvl="2"/>
             <a:r>
-              <a:rPr lang="en-US"/>
+              <a:rPr lang="en-GB"/>
               <a:t>Third level</a:t>
             </a:r>
           </a:p>
           <a:p>
             <a:pPr lvl="3"/>
             <a:r>
-              <a:rPr lang="en-US"/>
+              <a:rPr lang="en-GB"/>
               <a:t>Fourth level</a:t>
             </a:r>
           </a:p>
           <a:p>
             <a:pPr lvl="4"/>
             <a:r>
-              <a:rPr lang="en-US"/>
+              <a:rPr lang="en-GB"/>
               <a:t>Fifth level</a:t>
             </a:r>
+            <a:endParaRPr lang="en-US"/>
           </a:p>
         </p:txBody>
       </p:sp>
@@ -2667,37 +3254,38 @@
           <a:p>
             <a:pPr lvl="0"/>
             <a:r>
-              <a:rPr lang="en-US"/>
+              <a:rPr lang="en-GB"/>
               <a:t>Click to edit Master text styles</a:t>
             </a:r>
           </a:p>
           <a:p>
             <a:pPr lvl="1"/>
             <a:r>
-              <a:rPr lang="en-US"/>
+              <a:rPr lang="en-GB"/>
               <a:t>Second level</a:t>
             </a:r>
           </a:p>
           <a:p>
             <a:pPr lvl="2"/>
             <a:r>
-              <a:rPr lang="en-US"/>
+              <a:rPr lang="en-GB"/>
               <a:t>Third level</a:t>
             </a:r>
           </a:p>
           <a:p>
             <a:pPr lvl="3"/>
             <a:r>
-              <a:rPr lang="en-US"/>
+              <a:rPr lang="en-GB"/>
               <a:t>Fourth level</a:t>
             </a:r>
           </a:p>
           <a:p>
             <a:pPr lvl="4"/>
             <a:r>
-              <a:rPr lang="en-US"/>
+              <a:rPr lang="en-GB"/>
               <a:t>Fifth level</a:t>
             </a:r>
+            <a:endParaRPr lang="en-US"/>
           </a:p>
         </p:txBody>
       </p:sp>
@@ -2808,7 +3396,171 @@
           <p:cNvPr id="9" name="Straight Connector 8">
             <a:extLst>
               <a:ext uri="{FF2B5EF4-FFF2-40B4-BE49-F238E27FC236}">
-                <a16:creationId xmlns:a16="http://schemas.microsoft.com/office/drawing/2014/main" id="{BC9711DD-5845-C70F-57E1-61691E72C32F}"/>
+                <a16:creationId xmlns:a16="http://schemas.microsoft.com/office/drawing/2014/main" id="{0F42A16B-6893-A143-E832-A99D7B6427B3}"/>
+              </a:ext>
+            </a:extLst>
+          </p:cNvPr>
+          <p:cNvCxnSpPr/>
+          <p:nvPr/>
+        </p:nvCxnSpPr>
+        <p:spPr>
+          <a:xfrm>
+            <a:off x="609600" y="1447800"/>
+            <a:ext cx="11074400" cy="0"/>
+          </a:xfrm>
+          <a:prstGeom prst="line">
+            <a:avLst/>
+          </a:prstGeom>
+          <a:ln w="12700">
+            <a:solidFill>
+              <a:schemeClr val="tx1"/>
+            </a:solidFill>
+          </a:ln>
+        </p:spPr>
+        <p:style>
+          <a:lnRef idx="1">
+            <a:schemeClr val="accent1"/>
+          </a:lnRef>
+          <a:fillRef idx="0">
+            <a:schemeClr val="accent1"/>
+          </a:fillRef>
+          <a:effectRef idx="0">
+            <a:schemeClr val="accent1"/>
+          </a:effectRef>
+          <a:fontRef idx="minor">
+            <a:schemeClr val="tx1"/>
+          </a:fontRef>
+        </p:style>
+      </p:cxnSp>
+      <p:cxnSp>
+        <p:nvCxnSpPr>
+          <p:cNvPr id="10" name="Straight Connector 9">
+            <a:extLst>
+              <a:ext uri="{FF2B5EF4-FFF2-40B4-BE49-F238E27FC236}">
+                <a16:creationId xmlns:a16="http://schemas.microsoft.com/office/drawing/2014/main" id="{9B64861E-C2E3-2C0F-0C43-CF6F042CC211}"/>
+              </a:ext>
+            </a:extLst>
+          </p:cNvPr>
+          <p:cNvCxnSpPr/>
+          <p:nvPr/>
+        </p:nvCxnSpPr>
+        <p:spPr>
+          <a:xfrm>
+            <a:off x="609600" y="1447800"/>
+            <a:ext cx="11074400" cy="0"/>
+          </a:xfrm>
+          <a:prstGeom prst="line">
+            <a:avLst/>
+          </a:prstGeom>
+          <a:ln w="12700">
+            <a:solidFill>
+              <a:schemeClr val="tx1"/>
+            </a:solidFill>
+          </a:ln>
+        </p:spPr>
+        <p:style>
+          <a:lnRef idx="1">
+            <a:schemeClr val="accent1"/>
+          </a:lnRef>
+          <a:fillRef idx="0">
+            <a:schemeClr val="accent1"/>
+          </a:fillRef>
+          <a:effectRef idx="0">
+            <a:schemeClr val="accent1"/>
+          </a:effectRef>
+          <a:fontRef idx="minor">
+            <a:schemeClr val="tx1"/>
+          </a:fontRef>
+        </p:style>
+      </p:cxnSp>
+      <p:cxnSp>
+        <p:nvCxnSpPr>
+          <p:cNvPr id="11" name="Straight Connector 10">
+            <a:extLst>
+              <a:ext uri="{FF2B5EF4-FFF2-40B4-BE49-F238E27FC236}">
+                <a16:creationId xmlns:a16="http://schemas.microsoft.com/office/drawing/2014/main" id="{3DE2AD0E-60F6-798F-5218-679762744249}"/>
+              </a:ext>
+            </a:extLst>
+          </p:cNvPr>
+          <p:cNvCxnSpPr/>
+          <p:nvPr/>
+        </p:nvCxnSpPr>
+        <p:spPr>
+          <a:xfrm>
+            <a:off x="609600" y="1447800"/>
+            <a:ext cx="11074400" cy="0"/>
+          </a:xfrm>
+          <a:prstGeom prst="line">
+            <a:avLst/>
+          </a:prstGeom>
+          <a:ln w="12700">
+            <a:solidFill>
+              <a:schemeClr val="tx1"/>
+            </a:solidFill>
+          </a:ln>
+        </p:spPr>
+        <p:style>
+          <a:lnRef idx="1">
+            <a:schemeClr val="accent1"/>
+          </a:lnRef>
+          <a:fillRef idx="0">
+            <a:schemeClr val="accent1"/>
+          </a:fillRef>
+          <a:effectRef idx="0">
+            <a:schemeClr val="accent1"/>
+          </a:effectRef>
+          <a:fontRef idx="minor">
+            <a:schemeClr val="tx1"/>
+          </a:fontRef>
+        </p:style>
+      </p:cxnSp>
+      <p:cxnSp>
+        <p:nvCxnSpPr>
+          <p:cNvPr id="12" name="Straight Connector 11">
+            <a:extLst>
+              <a:ext uri="{FF2B5EF4-FFF2-40B4-BE49-F238E27FC236}">
+                <a16:creationId xmlns:a16="http://schemas.microsoft.com/office/drawing/2014/main" id="{C46373DF-09B0-AAD0-9A0F-77BAB32A9FC2}"/>
+              </a:ext>
+            </a:extLst>
+          </p:cNvPr>
+          <p:cNvCxnSpPr/>
+          <p:nvPr/>
+        </p:nvCxnSpPr>
+        <p:spPr>
+          <a:xfrm>
+            <a:off x="609600" y="1447800"/>
+            <a:ext cx="11074400" cy="0"/>
+          </a:xfrm>
+          <a:prstGeom prst="line">
+            <a:avLst/>
+          </a:prstGeom>
+          <a:ln w="12700">
+            <a:solidFill>
+              <a:schemeClr val="tx1"/>
+            </a:solidFill>
+          </a:ln>
+        </p:spPr>
+        <p:style>
+          <a:lnRef idx="1">
+            <a:schemeClr val="accent1"/>
+          </a:lnRef>
+          <a:fillRef idx="0">
+            <a:schemeClr val="accent1"/>
+          </a:fillRef>
+          <a:effectRef idx="0">
+            <a:schemeClr val="accent1"/>
+          </a:effectRef>
+          <a:fontRef idx="minor">
+            <a:schemeClr val="tx1"/>
+          </a:fontRef>
+        </p:style>
+      </p:cxnSp>
+      <p:cxnSp>
+        <p:nvCxnSpPr>
+          <p:cNvPr id="13" name="Straight Connector 12">
+            <a:extLst>
+              <a:ext uri="{FF2B5EF4-FFF2-40B4-BE49-F238E27FC236}">
+                <a16:creationId xmlns:a16="http://schemas.microsoft.com/office/drawing/2014/main" id="{15AA6AA3-C6AC-5B63-85A8-9838D4F5C983}"/>
               </a:ext>
             </a:extLst>
           </p:cNvPr>
@@ -2847,7 +3599,7 @@
     </p:spTree>
     <p:extLst>
       <p:ext uri="{BB962C8B-B14F-4D97-AF65-F5344CB8AC3E}">
-        <p14:creationId xmlns:p14="http://schemas.microsoft.com/office/powerpoint/2010/main" val="1165012610"/>
+        <p14:creationId xmlns:p14="http://schemas.microsoft.com/office/powerpoint/2010/main" val="2719097604"/>
       </p:ext>
     </p:extLst>
   </p:cSld>
@@ -2901,7 +3653,7 @@
           </a:lstStyle>
           <a:p>
             <a:r>
-              <a:rPr lang="en-US"/>
+              <a:rPr lang="en-GB"/>
               <a:t>Click to edit Master title style</a:t>
             </a:r>
             <a:endParaRPr lang="en-US" dirty="0"/>
@@ -2967,7 +3719,7 @@
           <a:p>
             <a:pPr lvl="0"/>
             <a:r>
-              <a:rPr lang="en-US"/>
+              <a:rPr lang="en-GB"/>
               <a:t>Click to edit Master text styles</a:t>
             </a:r>
           </a:p>
@@ -3023,37 +3775,38 @@
           <a:p>
             <a:pPr lvl="0"/>
             <a:r>
-              <a:rPr lang="en-US"/>
+              <a:rPr lang="en-GB"/>
               <a:t>Click to edit Master text styles</a:t>
             </a:r>
           </a:p>
           <a:p>
             <a:pPr lvl="1"/>
             <a:r>
-              <a:rPr lang="en-US"/>
+              <a:rPr lang="en-GB"/>
               <a:t>Second level</a:t>
             </a:r>
           </a:p>
           <a:p>
             <a:pPr lvl="2"/>
             <a:r>
-              <a:rPr lang="en-US"/>
+              <a:rPr lang="en-GB"/>
               <a:t>Third level</a:t>
             </a:r>
           </a:p>
           <a:p>
             <a:pPr lvl="3"/>
             <a:r>
-              <a:rPr lang="en-US"/>
+              <a:rPr lang="en-GB"/>
               <a:t>Fourth level</a:t>
             </a:r>
           </a:p>
           <a:p>
             <a:pPr lvl="4"/>
             <a:r>
-              <a:rPr lang="en-US"/>
+              <a:rPr lang="en-GB"/>
               <a:t>Fifth level</a:t>
             </a:r>
+            <a:endParaRPr lang="en-US"/>
           </a:p>
         </p:txBody>
       </p:sp>
@@ -3116,7 +3869,7 @@
           <a:p>
             <a:pPr lvl="0"/>
             <a:r>
-              <a:rPr lang="en-US"/>
+              <a:rPr lang="en-GB"/>
               <a:t>Click to edit Master text styles</a:t>
             </a:r>
           </a:p>
@@ -3172,37 +3925,38 @@
           <a:p>
             <a:pPr lvl="0"/>
             <a:r>
-              <a:rPr lang="en-US"/>
+              <a:rPr lang="en-GB"/>
               <a:t>Click to edit Master text styles</a:t>
             </a:r>
           </a:p>
           <a:p>
             <a:pPr lvl="1"/>
             <a:r>
-              <a:rPr lang="en-US"/>
+              <a:rPr lang="en-GB"/>
               <a:t>Second level</a:t>
             </a:r>
           </a:p>
           <a:p>
             <a:pPr lvl="2"/>
             <a:r>
-              <a:rPr lang="en-US"/>
+              <a:rPr lang="en-GB"/>
               <a:t>Third level</a:t>
             </a:r>
           </a:p>
           <a:p>
             <a:pPr lvl="3"/>
             <a:r>
-              <a:rPr lang="en-US"/>
+              <a:rPr lang="en-GB"/>
               <a:t>Fourth level</a:t>
             </a:r>
           </a:p>
           <a:p>
             <a:pPr lvl="4"/>
             <a:r>
-              <a:rPr lang="en-US"/>
+              <a:rPr lang="en-GB"/>
               <a:t>Fifth level</a:t>
             </a:r>
+            <a:endParaRPr lang="en-US"/>
           </a:p>
         </p:txBody>
       </p:sp>
@@ -3313,7 +4067,130 @@
           <p:cNvPr id="11" name="Straight Connector 10">
             <a:extLst>
               <a:ext uri="{FF2B5EF4-FFF2-40B4-BE49-F238E27FC236}">
-                <a16:creationId xmlns:a16="http://schemas.microsoft.com/office/drawing/2014/main" id="{EB7D832D-3E10-6ECB-E34A-37F4FBBD4630}"/>
+                <a16:creationId xmlns:a16="http://schemas.microsoft.com/office/drawing/2014/main" id="{F3436290-11E2-F20B-966B-F18296CC48D7}"/>
+              </a:ext>
+            </a:extLst>
+          </p:cNvPr>
+          <p:cNvCxnSpPr/>
+          <p:nvPr/>
+        </p:nvCxnSpPr>
+        <p:spPr>
+          <a:xfrm>
+            <a:off x="609600" y="1447800"/>
+            <a:ext cx="11074400" cy="0"/>
+          </a:xfrm>
+          <a:prstGeom prst="line">
+            <a:avLst/>
+          </a:prstGeom>
+          <a:ln w="12700">
+            <a:solidFill>
+              <a:schemeClr val="tx1"/>
+            </a:solidFill>
+          </a:ln>
+        </p:spPr>
+        <p:style>
+          <a:lnRef idx="1">
+            <a:schemeClr val="accent1"/>
+          </a:lnRef>
+          <a:fillRef idx="0">
+            <a:schemeClr val="accent1"/>
+          </a:fillRef>
+          <a:effectRef idx="0">
+            <a:schemeClr val="accent1"/>
+          </a:effectRef>
+          <a:fontRef idx="minor">
+            <a:schemeClr val="tx1"/>
+          </a:fontRef>
+        </p:style>
+      </p:cxnSp>
+      <p:cxnSp>
+        <p:nvCxnSpPr>
+          <p:cNvPr id="12" name="Straight Connector 11">
+            <a:extLst>
+              <a:ext uri="{FF2B5EF4-FFF2-40B4-BE49-F238E27FC236}">
+                <a16:creationId xmlns:a16="http://schemas.microsoft.com/office/drawing/2014/main" id="{7669D825-370C-D932-7B44-4C1EE0EB0E21}"/>
+              </a:ext>
+            </a:extLst>
+          </p:cNvPr>
+          <p:cNvCxnSpPr/>
+          <p:nvPr/>
+        </p:nvCxnSpPr>
+        <p:spPr>
+          <a:xfrm>
+            <a:off x="609600" y="1447800"/>
+            <a:ext cx="11074400" cy="0"/>
+          </a:xfrm>
+          <a:prstGeom prst="line">
+            <a:avLst/>
+          </a:prstGeom>
+          <a:ln w="12700">
+            <a:solidFill>
+              <a:schemeClr val="tx1"/>
+            </a:solidFill>
+          </a:ln>
+        </p:spPr>
+        <p:style>
+          <a:lnRef idx="1">
+            <a:schemeClr val="accent1"/>
+          </a:lnRef>
+          <a:fillRef idx="0">
+            <a:schemeClr val="accent1"/>
+          </a:fillRef>
+          <a:effectRef idx="0">
+            <a:schemeClr val="accent1"/>
+          </a:effectRef>
+          <a:fontRef idx="minor">
+            <a:schemeClr val="tx1"/>
+          </a:fontRef>
+        </p:style>
+      </p:cxnSp>
+      <p:cxnSp>
+        <p:nvCxnSpPr>
+          <p:cNvPr id="13" name="Straight Connector 12">
+            <a:extLst>
+              <a:ext uri="{FF2B5EF4-FFF2-40B4-BE49-F238E27FC236}">
+                <a16:creationId xmlns:a16="http://schemas.microsoft.com/office/drawing/2014/main" id="{DB1F2B53-681A-1F9B-D38D-923C8065AAE2}"/>
+              </a:ext>
+            </a:extLst>
+          </p:cNvPr>
+          <p:cNvCxnSpPr/>
+          <p:nvPr/>
+        </p:nvCxnSpPr>
+        <p:spPr>
+          <a:xfrm>
+            <a:off x="609600" y="1447800"/>
+            <a:ext cx="11074400" cy="0"/>
+          </a:xfrm>
+          <a:prstGeom prst="line">
+            <a:avLst/>
+          </a:prstGeom>
+          <a:ln w="12700">
+            <a:solidFill>
+              <a:schemeClr val="tx1"/>
+            </a:solidFill>
+          </a:ln>
+        </p:spPr>
+        <p:style>
+          <a:lnRef idx="1">
+            <a:schemeClr val="accent1"/>
+          </a:lnRef>
+          <a:fillRef idx="0">
+            <a:schemeClr val="accent1"/>
+          </a:fillRef>
+          <a:effectRef idx="0">
+            <a:schemeClr val="accent1"/>
+          </a:effectRef>
+          <a:fontRef idx="minor">
+            <a:schemeClr val="tx1"/>
+          </a:fontRef>
+        </p:style>
+      </p:cxnSp>
+      <p:cxnSp>
+        <p:nvCxnSpPr>
+          <p:cNvPr id="14" name="Straight Connector 13">
+            <a:extLst>
+              <a:ext uri="{FF2B5EF4-FFF2-40B4-BE49-F238E27FC236}">
+                <a16:creationId xmlns:a16="http://schemas.microsoft.com/office/drawing/2014/main" id="{EE4515DC-F7D2-3B8C-F35C-93EB5804B64F}"/>
               </a:ext>
             </a:extLst>
           </p:cNvPr>
@@ -3352,7 +4229,7 @@
     </p:spTree>
     <p:extLst>
       <p:ext uri="{BB962C8B-B14F-4D97-AF65-F5344CB8AC3E}">
-        <p14:creationId xmlns:p14="http://schemas.microsoft.com/office/powerpoint/2010/main" val="4100874282"/>
+        <p14:creationId xmlns:p14="http://schemas.microsoft.com/office/powerpoint/2010/main" val="646296267"/>
       </p:ext>
     </p:extLst>
   </p:cSld>
@@ -3406,7 +4283,7 @@
           </a:lstStyle>
           <a:p>
             <a:r>
-              <a:rPr lang="en-US"/>
+              <a:rPr lang="en-GB"/>
               <a:t>Click to edit Master title style</a:t>
             </a:r>
             <a:endParaRPr lang="en-US" dirty="0"/>
@@ -3520,7 +4397,171 @@
           <p:cNvPr id="7" name="Straight Connector 6">
             <a:extLst>
               <a:ext uri="{FF2B5EF4-FFF2-40B4-BE49-F238E27FC236}">
-                <a16:creationId xmlns:a16="http://schemas.microsoft.com/office/drawing/2014/main" id="{BECC3C94-B1FB-A16A-8497-B1E8C2BD31B9}"/>
+                <a16:creationId xmlns:a16="http://schemas.microsoft.com/office/drawing/2014/main" id="{BDB4946F-2A50-46DF-D246-8E463A5B9E4E}"/>
+              </a:ext>
+            </a:extLst>
+          </p:cNvPr>
+          <p:cNvCxnSpPr/>
+          <p:nvPr/>
+        </p:nvCxnSpPr>
+        <p:spPr>
+          <a:xfrm>
+            <a:off x="609600" y="1447800"/>
+            <a:ext cx="11074400" cy="0"/>
+          </a:xfrm>
+          <a:prstGeom prst="line">
+            <a:avLst/>
+          </a:prstGeom>
+          <a:ln w="12700">
+            <a:solidFill>
+              <a:schemeClr val="tx1"/>
+            </a:solidFill>
+          </a:ln>
+        </p:spPr>
+        <p:style>
+          <a:lnRef idx="1">
+            <a:schemeClr val="accent1"/>
+          </a:lnRef>
+          <a:fillRef idx="0">
+            <a:schemeClr val="accent1"/>
+          </a:fillRef>
+          <a:effectRef idx="0">
+            <a:schemeClr val="accent1"/>
+          </a:effectRef>
+          <a:fontRef idx="minor">
+            <a:schemeClr val="tx1"/>
+          </a:fontRef>
+        </p:style>
+      </p:cxnSp>
+      <p:cxnSp>
+        <p:nvCxnSpPr>
+          <p:cNvPr id="8" name="Straight Connector 7">
+            <a:extLst>
+              <a:ext uri="{FF2B5EF4-FFF2-40B4-BE49-F238E27FC236}">
+                <a16:creationId xmlns:a16="http://schemas.microsoft.com/office/drawing/2014/main" id="{CCF61A43-37C0-D158-13BE-1753663F3BEC}"/>
+              </a:ext>
+            </a:extLst>
+          </p:cNvPr>
+          <p:cNvCxnSpPr/>
+          <p:nvPr/>
+        </p:nvCxnSpPr>
+        <p:spPr>
+          <a:xfrm>
+            <a:off x="609600" y="1447800"/>
+            <a:ext cx="11074400" cy="0"/>
+          </a:xfrm>
+          <a:prstGeom prst="line">
+            <a:avLst/>
+          </a:prstGeom>
+          <a:ln w="12700">
+            <a:solidFill>
+              <a:schemeClr val="tx1"/>
+            </a:solidFill>
+          </a:ln>
+        </p:spPr>
+        <p:style>
+          <a:lnRef idx="1">
+            <a:schemeClr val="accent1"/>
+          </a:lnRef>
+          <a:fillRef idx="0">
+            <a:schemeClr val="accent1"/>
+          </a:fillRef>
+          <a:effectRef idx="0">
+            <a:schemeClr val="accent1"/>
+          </a:effectRef>
+          <a:fontRef idx="minor">
+            <a:schemeClr val="tx1"/>
+          </a:fontRef>
+        </p:style>
+      </p:cxnSp>
+      <p:cxnSp>
+        <p:nvCxnSpPr>
+          <p:cNvPr id="9" name="Straight Connector 8">
+            <a:extLst>
+              <a:ext uri="{FF2B5EF4-FFF2-40B4-BE49-F238E27FC236}">
+                <a16:creationId xmlns:a16="http://schemas.microsoft.com/office/drawing/2014/main" id="{3D85FD0A-2A17-4E36-7ACE-8DDECE72BE20}"/>
+              </a:ext>
+            </a:extLst>
+          </p:cNvPr>
+          <p:cNvCxnSpPr/>
+          <p:nvPr/>
+        </p:nvCxnSpPr>
+        <p:spPr>
+          <a:xfrm>
+            <a:off x="609600" y="1447800"/>
+            <a:ext cx="11074400" cy="0"/>
+          </a:xfrm>
+          <a:prstGeom prst="line">
+            <a:avLst/>
+          </a:prstGeom>
+          <a:ln w="12700">
+            <a:solidFill>
+              <a:schemeClr val="tx1"/>
+            </a:solidFill>
+          </a:ln>
+        </p:spPr>
+        <p:style>
+          <a:lnRef idx="1">
+            <a:schemeClr val="accent1"/>
+          </a:lnRef>
+          <a:fillRef idx="0">
+            <a:schemeClr val="accent1"/>
+          </a:fillRef>
+          <a:effectRef idx="0">
+            <a:schemeClr val="accent1"/>
+          </a:effectRef>
+          <a:fontRef idx="minor">
+            <a:schemeClr val="tx1"/>
+          </a:fontRef>
+        </p:style>
+      </p:cxnSp>
+      <p:cxnSp>
+        <p:nvCxnSpPr>
+          <p:cNvPr id="10" name="Straight Connector 9">
+            <a:extLst>
+              <a:ext uri="{FF2B5EF4-FFF2-40B4-BE49-F238E27FC236}">
+                <a16:creationId xmlns:a16="http://schemas.microsoft.com/office/drawing/2014/main" id="{037180BA-0CE4-6687-797D-9C4100B1A0B8}"/>
+              </a:ext>
+            </a:extLst>
+          </p:cNvPr>
+          <p:cNvCxnSpPr/>
+          <p:nvPr/>
+        </p:nvCxnSpPr>
+        <p:spPr>
+          <a:xfrm>
+            <a:off x="609600" y="1447800"/>
+            <a:ext cx="11074400" cy="0"/>
+          </a:xfrm>
+          <a:prstGeom prst="line">
+            <a:avLst/>
+          </a:prstGeom>
+          <a:ln w="12700">
+            <a:solidFill>
+              <a:schemeClr val="tx1"/>
+            </a:solidFill>
+          </a:ln>
+        </p:spPr>
+        <p:style>
+          <a:lnRef idx="1">
+            <a:schemeClr val="accent1"/>
+          </a:lnRef>
+          <a:fillRef idx="0">
+            <a:schemeClr val="accent1"/>
+          </a:fillRef>
+          <a:effectRef idx="0">
+            <a:schemeClr val="accent1"/>
+          </a:effectRef>
+          <a:fontRef idx="minor">
+            <a:schemeClr val="tx1"/>
+          </a:fontRef>
+        </p:style>
+      </p:cxnSp>
+      <p:cxnSp>
+        <p:nvCxnSpPr>
+          <p:cNvPr id="11" name="Straight Connector 10">
+            <a:extLst>
+              <a:ext uri="{FF2B5EF4-FFF2-40B4-BE49-F238E27FC236}">
+                <a16:creationId xmlns:a16="http://schemas.microsoft.com/office/drawing/2014/main" id="{7B1EA7A8-55C2-AF44-F799-8607C22D503D}"/>
               </a:ext>
             </a:extLst>
           </p:cNvPr>
@@ -3559,7 +4600,7 @@
     </p:spTree>
     <p:extLst>
       <p:ext uri="{BB962C8B-B14F-4D97-AF65-F5344CB8AC3E}">
-        <p14:creationId xmlns:p14="http://schemas.microsoft.com/office/powerpoint/2010/main" val="3687892729"/>
+        <p14:creationId xmlns:p14="http://schemas.microsoft.com/office/powerpoint/2010/main" val="964905080"/>
       </p:ext>
     </p:extLst>
   </p:cSld>
@@ -3656,7 +4697,7 @@
     </p:spTree>
     <p:extLst>
       <p:ext uri="{BB962C8B-B14F-4D97-AF65-F5344CB8AC3E}">
-        <p14:creationId xmlns:p14="http://schemas.microsoft.com/office/powerpoint/2010/main" val="3407835005"/>
+        <p14:creationId xmlns:p14="http://schemas.microsoft.com/office/powerpoint/2010/main" val="4017242258"/>
       </p:ext>
     </p:extLst>
   </p:cSld>
@@ -3708,9 +4749,10 @@
           </a:lstStyle>
           <a:p>
             <a:r>
-              <a:rPr lang="en-US"/>
+              <a:rPr lang="en-GB"/>
               <a:t>Click to edit Master title style</a:t>
             </a:r>
+            <a:endParaRPr lang="en-US"/>
           </a:p>
         </p:txBody>
       </p:sp>
@@ -3764,37 +4806,38 @@
           <a:p>
             <a:pPr lvl="0"/>
             <a:r>
-              <a:rPr lang="en-US"/>
+              <a:rPr lang="en-GB"/>
               <a:t>Click to edit Master text styles</a:t>
             </a:r>
           </a:p>
           <a:p>
             <a:pPr lvl="1"/>
             <a:r>
-              <a:rPr lang="en-US"/>
+              <a:rPr lang="en-GB"/>
               <a:t>Second level</a:t>
             </a:r>
           </a:p>
           <a:p>
             <a:pPr lvl="2"/>
             <a:r>
-              <a:rPr lang="en-US"/>
+              <a:rPr lang="en-GB"/>
               <a:t>Third level</a:t>
             </a:r>
           </a:p>
           <a:p>
             <a:pPr lvl="3"/>
             <a:r>
-              <a:rPr lang="en-US"/>
+              <a:rPr lang="en-GB"/>
               <a:t>Fourth level</a:t>
             </a:r>
           </a:p>
           <a:p>
             <a:pPr lvl="4"/>
             <a:r>
-              <a:rPr lang="en-US"/>
+              <a:rPr lang="en-GB"/>
               <a:t>Fifth level</a:t>
             </a:r>
+            <a:endParaRPr lang="en-US"/>
           </a:p>
         </p:txBody>
       </p:sp>
@@ -3857,7 +4900,7 @@
           <a:p>
             <a:pPr lvl="0"/>
             <a:r>
-              <a:rPr lang="en-US"/>
+              <a:rPr lang="en-GB"/>
               <a:t>Click to edit Master text styles</a:t>
             </a:r>
           </a:p>
@@ -3933,7 +4976,7 @@
     </p:spTree>
     <p:extLst>
       <p:ext uri="{BB962C8B-B14F-4D97-AF65-F5344CB8AC3E}">
-        <p14:creationId xmlns:p14="http://schemas.microsoft.com/office/powerpoint/2010/main" val="3297793048"/>
+        <p14:creationId xmlns:p14="http://schemas.microsoft.com/office/powerpoint/2010/main" val="899395906"/>
       </p:ext>
     </p:extLst>
   </p:cSld>
@@ -3985,9 +5028,10 @@
           </a:lstStyle>
           <a:p>
             <a:r>
-              <a:rPr lang="en-US"/>
+              <a:rPr lang="en-GB"/>
               <a:t>Click to edit Master title style</a:t>
             </a:r>
+            <a:endParaRPr lang="en-US"/>
           </a:p>
         </p:txBody>
       </p:sp>
@@ -4049,9 +5093,10 @@
           </a:lstStyle>
           <a:p>
             <a:r>
-              <a:rPr lang="en-US"/>
+              <a:rPr lang="en-GB"/>
               <a:t>Click icon to add picture</a:t>
             </a:r>
+            <a:endParaRPr lang="en-US"/>
           </a:p>
         </p:txBody>
       </p:sp>
@@ -4114,7 +5159,7 @@
           <a:p>
             <a:pPr lvl="0"/>
             <a:r>
-              <a:rPr lang="en-US"/>
+              <a:rPr lang="en-GB"/>
               <a:t>Click to edit Master text styles</a:t>
             </a:r>
           </a:p>
@@ -4190,7 +5235,7 @@
     </p:spTree>
     <p:extLst>
       <p:ext uri="{BB962C8B-B14F-4D97-AF65-F5344CB8AC3E}">
-        <p14:creationId xmlns:p14="http://schemas.microsoft.com/office/powerpoint/2010/main" val="784706133"/>
+        <p14:creationId xmlns:p14="http://schemas.microsoft.com/office/powerpoint/2010/main" val="3978033137"/>
       </p:ext>
     </p:extLst>
   </p:cSld>
@@ -4204,9 +5249,14 @@
 <p:sldMaster xmlns:a="http://schemas.openxmlformats.org/drawingml/2006/main" xmlns:r="http://schemas.openxmlformats.org/officeDocument/2006/relationships" xmlns:p="http://schemas.openxmlformats.org/presentationml/2006/main">
   <p:cSld>
     <p:bg>
-      <p:bgRef idx="1001">
-        <a:schemeClr val="bg1"/>
-      </p:bgRef>
+      <p:bgPr>
+        <a:solidFill>
+          <a:schemeClr val="bg1">
+            <a:lumMod val="85000"/>
+          </a:schemeClr>
+        </a:solidFill>
+        <a:effectLst/>
+      </p:bgPr>
     </p:bg>
     <p:spTree>
       <p:nvGrpSpPr>
@@ -4248,9 +5298,10 @@
           <a:lstStyle/>
           <a:p>
             <a:r>
-              <a:rPr lang="en-US"/>
+              <a:rPr lang="en-GB"/>
               <a:t>Click to edit Master title style</a:t>
             </a:r>
+            <a:endParaRPr lang="en-US"/>
           </a:p>
         </p:txBody>
       </p:sp>
@@ -4281,37 +5332,38 @@
           <a:p>
             <a:pPr lvl="0"/>
             <a:r>
-              <a:rPr lang="en-US"/>
+              <a:rPr lang="en-GB"/>
               <a:t>Click to edit Master text styles</a:t>
             </a:r>
           </a:p>
           <a:p>
             <a:pPr lvl="1"/>
             <a:r>
-              <a:rPr lang="en-US"/>
+              <a:rPr lang="en-GB"/>
               <a:t>Second level</a:t>
             </a:r>
           </a:p>
           <a:p>
             <a:pPr lvl="2"/>
             <a:r>
-              <a:rPr lang="en-US"/>
+              <a:rPr lang="en-GB"/>
               <a:t>Third level</a:t>
             </a:r>
           </a:p>
           <a:p>
             <a:pPr lvl="3"/>
             <a:r>
-              <a:rPr lang="en-US"/>
+              <a:rPr lang="en-GB"/>
               <a:t>Fourth level</a:t>
             </a:r>
           </a:p>
           <a:p>
             <a:pPr lvl="4"/>
             <a:r>
-              <a:rPr lang="en-US"/>
+              <a:rPr lang="en-GB"/>
               <a:t>Fifth level</a:t>
             </a:r>
+            <a:endParaRPr lang="en-US"/>
           </a:p>
         </p:txBody>
       </p:sp>
@@ -4439,24 +5491,27 @@
     </p:spTree>
     <p:extLst>
       <p:ext uri="{BB962C8B-B14F-4D97-AF65-F5344CB8AC3E}">
-        <p14:creationId xmlns:p14="http://schemas.microsoft.com/office/powerpoint/2010/main" val="2674268291"/>
+        <p14:creationId xmlns:p14="http://schemas.microsoft.com/office/powerpoint/2010/main" val="260164594"/>
       </p:ext>
     </p:extLst>
   </p:cSld>
   <p:clrMap bg1="lt1" tx1="dk1" bg2="lt2" tx2="dk2" accent1="accent1" accent2="accent2" accent3="accent3" accent4="accent4" accent5="accent5" accent6="accent6" hlink="hlink" folHlink="folHlink"/>
   <p:sldLayoutIdLst>
-    <p:sldLayoutId id="2147483661" r:id="rId1"/>
-    <p:sldLayoutId id="2147483662" r:id="rId2"/>
-    <p:sldLayoutId id="2147483663" r:id="rId3"/>
-    <p:sldLayoutId id="2147483664" r:id="rId4"/>
-    <p:sldLayoutId id="2147483665" r:id="rId5"/>
-    <p:sldLayoutId id="2147483666" r:id="rId6"/>
-    <p:sldLayoutId id="2147483667" r:id="rId7"/>
-    <p:sldLayoutId id="2147483668" r:id="rId8"/>
-    <p:sldLayoutId id="2147483669" r:id="rId9"/>
-    <p:sldLayoutId id="2147483670" r:id="rId10"/>
-    <p:sldLayoutId id="2147483671" r:id="rId11"/>
-    <p:sldLayoutId id="2147483672" r:id="rId12"/>
+    <p:sldLayoutId id="2147483674" r:id="rId1"/>
+    <p:sldLayoutId id="2147483675" r:id="rId2"/>
+    <p:sldLayoutId id="2147483676" r:id="rId3"/>
+    <p:sldLayoutId id="2147483677" r:id="rId4"/>
+    <p:sldLayoutId id="2147483678" r:id="rId5"/>
+    <p:sldLayoutId id="2147483679" r:id="rId6"/>
+    <p:sldLayoutId id="2147483680" r:id="rId7"/>
+    <p:sldLayoutId id="2147483681" r:id="rId8"/>
+    <p:sldLayoutId id="2147483682" r:id="rId9"/>
+    <p:sldLayoutId id="2147483683" r:id="rId10"/>
+    <p:sldLayoutId id="2147483684" r:id="rId11"/>
+    <p:sldLayoutId id="2147483685" r:id="rId12"/>
+    <p:sldLayoutId id="2147483686" r:id="rId13"/>
+    <p:sldLayoutId id="2147483687" r:id="rId14"/>
+    <p:sldLayoutId id="2147483688" r:id="rId15"/>
   </p:sldLayoutIdLst>
   <p:txStyles>
     <p:titleStyle>
@@ -13945,7 +15000,7 @@
 </file>
 
 <file path=ppt/theme/theme1.xml><?xml version="1.0" encoding="utf-8"?>
-<a:theme xmlns:a="http://schemas.openxmlformats.org/drawingml/2006/main" name="intro">
+<a:theme xmlns:a="http://schemas.openxmlformats.org/drawingml/2006/main" name="a-processing-mouse-event-methods">
   <a:themeElements>
     <a:clrScheme name="Office">
       <a:dk1>
